--- a/chapter7/parts/part-05-impacts-of-dataset-bias/clip.pptx
+++ b/chapter7/parts/part-05-impacts-of-dataset-bias/clip.pptx
@@ -4327,10 +4327,12 @@
           </a:bodyPr>
           <a:lstStyle/>
           <a:p>
-            <a:pPr>
+            <a:pPr lvl="0" marL="457200" indent="-228600">
+              <a:buFont typeface="Calibri"/>
               <a:spcAft>
                 <a:spcPts val="1000"/>
               </a:spcAft>
+              <a:buSzPct val="100000"/>
               <a:buChar char="•"/>
               <a:lnSpc>
                 <a:spcPts val="2200"/>
@@ -4347,10 +4349,12 @@
             </a:r>
           </a:p>
           <a:p>
-            <a:pPr>
+            <a:pPr lvl="0" marL="457200" indent="-228600">
+              <a:buFont typeface="Calibri"/>
               <a:spcAft>
                 <a:spcPts val="1000"/>
               </a:spcAft>
+              <a:buSzPct val="100000"/>
               <a:buChar char="•"/>
               <a:lnSpc>
                 <a:spcPts val="2200"/>
@@ -4367,10 +4371,12 @@
             </a:r>
           </a:p>
           <a:p>
-            <a:pPr>
+            <a:pPr lvl="0" marL="457200" indent="-228600">
+              <a:buFont typeface="Calibri"/>
               <a:spcAft>
                 <a:spcPts val="1000"/>
               </a:spcAft>
+              <a:buSzPct val="100000"/>
               <a:buChar char="•"/>
               <a:lnSpc>
                 <a:spcPts val="2200"/>
@@ -4387,10 +4393,12 @@
             </a:r>
           </a:p>
           <a:p>
-            <a:pPr>
+            <a:pPr lvl="0" marL="457200" indent="-228600">
+              <a:buFont typeface="Calibri"/>
               <a:spcAft>
                 <a:spcPts val="1000"/>
               </a:spcAft>
+              <a:buSzPct val="100000"/>
               <a:buChar char="•"/>
               <a:lnSpc>
                 <a:spcPts val="2200"/>
@@ -4407,10 +4415,12 @@
             </a:r>
           </a:p>
           <a:p>
-            <a:pPr>
+            <a:pPr lvl="0" marL="457200" indent="-228600">
+              <a:buFont typeface="Calibri"/>
               <a:spcAft>
                 <a:spcPts val="1000"/>
               </a:spcAft>
+              <a:buSzPct val="100000"/>
               <a:buChar char="•"/>
               <a:lnSpc>
                 <a:spcPts val="2200"/>
@@ -4546,10 +4556,12 @@
           </a:bodyPr>
           <a:lstStyle/>
           <a:p>
-            <a:pPr>
+            <a:pPr lvl="0" marL="457200" indent="-228600">
+              <a:buFont typeface="Calibri"/>
               <a:spcAft>
                 <a:spcPts val="1000"/>
               </a:spcAft>
+              <a:buSzPct val="100000"/>
               <a:buChar char="•"/>
               <a:lnSpc>
                 <a:spcPts val="2200"/>
@@ -4566,10 +4578,12 @@
             </a:r>
           </a:p>
           <a:p>
-            <a:pPr>
+            <a:pPr lvl="0" marL="457200" indent="-228600">
+              <a:buFont typeface="Calibri"/>
               <a:spcAft>
                 <a:spcPts val="1000"/>
               </a:spcAft>
+              <a:buSzPct val="100000"/>
               <a:buChar char="•"/>
               <a:lnSpc>
                 <a:spcPts val="2200"/>
@@ -4705,10 +4719,12 @@
           </a:bodyPr>
           <a:lstStyle/>
           <a:p>
-            <a:pPr>
+            <a:pPr lvl="0" marL="457200" indent="-228600">
+              <a:buFont typeface="Calibri"/>
               <a:spcAft>
                 <a:spcPts val="1000"/>
               </a:spcAft>
+              <a:buSzPct val="100000"/>
               <a:buChar char="•"/>
               <a:lnSpc>
                 <a:spcPts val="2200"/>
@@ -4844,10 +4860,12 @@
           </a:bodyPr>
           <a:lstStyle/>
           <a:p>
-            <a:pPr>
+            <a:pPr lvl="0" marL="457200" indent="-228600">
+              <a:buFont typeface="Calibri"/>
               <a:spcAft>
                 <a:spcPts val="1000"/>
               </a:spcAft>
+              <a:buSzPct val="100000"/>
               <a:buChar char="•"/>
               <a:lnSpc>
                 <a:spcPts val="2200"/>
@@ -4864,10 +4882,12 @@
             </a:r>
           </a:p>
           <a:p>
-            <a:pPr>
+            <a:pPr lvl="0" marL="457200" indent="-228600">
+              <a:buFont typeface="Calibri"/>
               <a:spcAft>
                 <a:spcPts val="1000"/>
               </a:spcAft>
+              <a:buSzPct val="100000"/>
               <a:buChar char="•"/>
               <a:lnSpc>
                 <a:spcPts val="2200"/>
@@ -4884,10 +4904,12 @@
             </a:r>
           </a:p>
           <a:p>
-            <a:pPr>
+            <a:pPr lvl="0" marL="457200" indent="-228600">
+              <a:buFont typeface="Calibri"/>
               <a:spcAft>
                 <a:spcPts val="1000"/>
               </a:spcAft>
+              <a:buSzPct val="100000"/>
               <a:buChar char="•"/>
               <a:lnSpc>
                 <a:spcPts val="2200"/>
@@ -4904,10 +4926,12 @@
             </a:r>
           </a:p>
           <a:p>
-            <a:pPr>
+            <a:pPr lvl="0" marL="457200" indent="-228600">
+              <a:buFont typeface="Calibri"/>
               <a:spcAft>
                 <a:spcPts val="1000"/>
               </a:spcAft>
+              <a:buSzPct val="100000"/>
               <a:buChar char="•"/>
               <a:lnSpc>
                 <a:spcPts val="2200"/>
@@ -4924,10 +4948,12 @@
             </a:r>
           </a:p>
           <a:p>
-            <a:pPr>
+            <a:pPr lvl="0" marL="457200" indent="-228600">
+              <a:buFont typeface="Calibri"/>
               <a:spcAft>
                 <a:spcPts val="1000"/>
               </a:spcAft>
+              <a:buSzPct val="100000"/>
               <a:buChar char="•"/>
               <a:lnSpc>
                 <a:spcPts val="2200"/>
@@ -5526,10 +5552,12 @@
           </a:bodyPr>
           <a:lstStyle/>
           <a:p>
-            <a:pPr>
+            <a:pPr lvl="0" marL="457200" indent="-228600">
+              <a:buFont typeface="Calibri"/>
               <a:spcAft>
                 <a:spcPts val="1000"/>
               </a:spcAft>
+              <a:buSzPct val="100000"/>
               <a:buChar char="•"/>
               <a:lnSpc>
                 <a:spcPts val="2200"/>
@@ -5546,10 +5574,12 @@
             </a:r>
           </a:p>
           <a:p>
-            <a:pPr>
+            <a:pPr lvl="0" marL="457200" indent="-228600">
+              <a:buFont typeface="Calibri"/>
               <a:spcAft>
                 <a:spcPts val="1000"/>
               </a:spcAft>
+              <a:buSzPct val="100000"/>
               <a:buChar char="•"/>
               <a:lnSpc>
                 <a:spcPts val="2200"/>
@@ -5566,10 +5596,12 @@
             </a:r>
           </a:p>
           <a:p>
-            <a:pPr>
+            <a:pPr lvl="0" marL="457200" indent="-228600">
+              <a:buFont typeface="Calibri"/>
               <a:spcAft>
                 <a:spcPts val="1000"/>
               </a:spcAft>
+              <a:buSzPct val="100000"/>
               <a:buChar char="•"/>
               <a:lnSpc>
                 <a:spcPts val="2200"/>
@@ -5586,10 +5618,12 @@
             </a:r>
           </a:p>
           <a:p>
-            <a:pPr>
+            <a:pPr lvl="0" marL="457200" indent="-228600">
+              <a:buFont typeface="Calibri"/>
               <a:spcAft>
                 <a:spcPts val="1000"/>
               </a:spcAft>
+              <a:buSzPct val="100000"/>
               <a:buChar char="•"/>
               <a:lnSpc>
                 <a:spcPts val="2200"/>
@@ -5606,10 +5640,12 @@
             </a:r>
           </a:p>
           <a:p>
-            <a:pPr>
+            <a:pPr lvl="0" marL="457200" indent="-228600">
+              <a:buFont typeface="Calibri"/>
               <a:spcAft>
                 <a:spcPts val="1000"/>
               </a:spcAft>
+              <a:buSzPct val="100000"/>
               <a:buChar char="•"/>
               <a:lnSpc>
                 <a:spcPts val="2200"/>
@@ -5626,10 +5662,12 @@
             </a:r>
           </a:p>
           <a:p>
-            <a:pPr>
+            <a:pPr lvl="0" marL="457200" indent="-228600">
+              <a:buFont typeface="Calibri"/>
               <a:spcAft>
                 <a:spcPts val="1000"/>
               </a:spcAft>
+              <a:buSzPct val="100000"/>
               <a:buChar char="•"/>
               <a:lnSpc>
                 <a:spcPts val="2200"/>
@@ -5765,10 +5803,12 @@
           </a:bodyPr>
           <a:lstStyle/>
           <a:p>
-            <a:pPr>
+            <a:pPr lvl="0" marL="457200" indent="-228600">
+              <a:buFont typeface="Calibri"/>
               <a:spcAft>
                 <a:spcPts val="1000"/>
               </a:spcAft>
+              <a:buSzPct val="100000"/>
               <a:buChar char="•"/>
               <a:lnSpc>
                 <a:spcPts val="2200"/>
@@ -5785,10 +5825,12 @@
             </a:r>
           </a:p>
           <a:p>
-            <a:pPr>
+            <a:pPr lvl="0" marL="457200" indent="-228600">
+              <a:buFont typeface="Calibri"/>
               <a:spcAft>
                 <a:spcPts val="1000"/>
               </a:spcAft>
+              <a:buSzPct val="100000"/>
               <a:buChar char="•"/>
               <a:lnSpc>
                 <a:spcPts val="2200"/>
@@ -5805,10 +5847,12 @@
             </a:r>
           </a:p>
           <a:p>
-            <a:pPr>
+            <a:pPr lvl="0" marL="457200" indent="-228600">
+              <a:buFont typeface="Calibri"/>
               <a:spcAft>
                 <a:spcPts val="1000"/>
               </a:spcAft>
+              <a:buSzPct val="100000"/>
               <a:buChar char="•"/>
               <a:lnSpc>
                 <a:spcPts val="2200"/>
@@ -5825,10 +5869,12 @@
             </a:r>
           </a:p>
           <a:p>
-            <a:pPr>
+            <a:pPr lvl="0" marL="457200" indent="-228600">
+              <a:buFont typeface="Calibri"/>
               <a:spcAft>
                 <a:spcPts val="1000"/>
               </a:spcAft>
+              <a:buSzPct val="100000"/>
               <a:buChar char="•"/>
               <a:lnSpc>
                 <a:spcPts val="2200"/>
@@ -5845,10 +5891,12 @@
             </a:r>
           </a:p>
           <a:p>
-            <a:pPr>
+            <a:pPr lvl="0" marL="457200" indent="-228600">
+              <a:buFont typeface="Calibri"/>
               <a:spcAft>
                 <a:spcPts val="1000"/>
               </a:spcAft>
+              <a:buSzPct val="100000"/>
               <a:buChar char="•"/>
               <a:lnSpc>
                 <a:spcPts val="2200"/>
@@ -5984,10 +6032,12 @@
           </a:bodyPr>
           <a:lstStyle/>
           <a:p>
-            <a:pPr>
+            <a:pPr lvl="0" marL="457200" indent="-228600">
+              <a:buFont typeface="Calibri"/>
               <a:spcAft>
                 <a:spcPts val="1000"/>
               </a:spcAft>
+              <a:buSzPct val="100000"/>
               <a:buChar char="•"/>
               <a:lnSpc>
                 <a:spcPts val="2200"/>
@@ -6004,10 +6054,12 @@
             </a:r>
           </a:p>
           <a:p>
-            <a:pPr>
+            <a:pPr lvl="0" marL="457200" indent="-228600">
+              <a:buFont typeface="Calibri"/>
               <a:spcAft>
                 <a:spcPts val="1000"/>
               </a:spcAft>
+              <a:buSzPct val="100000"/>
               <a:buChar char="•"/>
               <a:lnSpc>
                 <a:spcPts val="2200"/>
@@ -6024,10 +6076,12 @@
             </a:r>
           </a:p>
           <a:p>
-            <a:pPr>
+            <a:pPr lvl="0" marL="457200" indent="-228600">
+              <a:buFont typeface="Calibri"/>
               <a:spcAft>
                 <a:spcPts val="1000"/>
               </a:spcAft>
+              <a:buSzPct val="100000"/>
               <a:buChar char="•"/>
               <a:lnSpc>
                 <a:spcPts val="2200"/>
@@ -6044,10 +6098,12 @@
             </a:r>
           </a:p>
           <a:p>
-            <a:pPr>
+            <a:pPr lvl="0" marL="457200" indent="-228600">
+              <a:buFont typeface="Calibri"/>
               <a:spcAft>
                 <a:spcPts val="1000"/>
               </a:spcAft>
+              <a:buSzPct val="100000"/>
               <a:buChar char="•"/>
               <a:lnSpc>
                 <a:spcPts val="2200"/>
@@ -6064,10 +6120,12 @@
             </a:r>
           </a:p>
           <a:p>
-            <a:pPr>
+            <a:pPr lvl="0" marL="457200" indent="-228600">
+              <a:buFont typeface="Calibri"/>
               <a:spcAft>
                 <a:spcPts val="1000"/>
               </a:spcAft>
+              <a:buSzPct val="100000"/>
               <a:buChar char="•"/>
               <a:lnSpc>
                 <a:spcPts val="2200"/>
@@ -6084,10 +6142,12 @@
             </a:r>
           </a:p>
           <a:p>
-            <a:pPr>
+            <a:pPr lvl="0" marL="457200" indent="-228600">
+              <a:buFont typeface="Calibri"/>
               <a:spcAft>
                 <a:spcPts val="1000"/>
               </a:spcAft>
+              <a:buSzPct val="100000"/>
               <a:buChar char="•"/>
               <a:lnSpc>
                 <a:spcPts val="2200"/>
@@ -6223,10 +6283,12 @@
           </a:bodyPr>
           <a:lstStyle/>
           <a:p>
-            <a:pPr>
+            <a:pPr lvl="0" marL="457200" indent="-228600">
+              <a:buFont typeface="Calibri"/>
               <a:spcAft>
                 <a:spcPts val="1000"/>
               </a:spcAft>
+              <a:buSzPct val="100000"/>
               <a:buChar char="•"/>
               <a:lnSpc>
                 <a:spcPts val="2200"/>
@@ -6243,10 +6305,12 @@
             </a:r>
           </a:p>
           <a:p>
-            <a:pPr>
+            <a:pPr lvl="0" marL="457200" indent="-228600">
+              <a:buFont typeface="Calibri"/>
               <a:spcAft>
                 <a:spcPts val="1000"/>
               </a:spcAft>
+              <a:buSzPct val="100000"/>
               <a:buChar char="•"/>
               <a:lnSpc>
                 <a:spcPts val="2200"/>
@@ -6263,10 +6327,12 @@
             </a:r>
           </a:p>
           <a:p>
-            <a:pPr>
+            <a:pPr lvl="0" marL="457200" indent="-228600">
+              <a:buFont typeface="Calibri"/>
               <a:spcAft>
                 <a:spcPts val="1000"/>
               </a:spcAft>
+              <a:buSzPct val="100000"/>
               <a:buChar char="•"/>
               <a:lnSpc>
                 <a:spcPts val="2200"/>
@@ -6402,10 +6468,12 @@
           </a:bodyPr>
           <a:lstStyle/>
           <a:p>
-            <a:pPr>
+            <a:pPr lvl="0" marL="457200" indent="-228600">
+              <a:buFont typeface="Calibri"/>
               <a:spcAft>
                 <a:spcPts val="1000"/>
               </a:spcAft>
+              <a:buSzPct val="100000"/>
               <a:buChar char="•"/>
               <a:lnSpc>
                 <a:spcPts val="2200"/>
@@ -6422,10 +6490,12 @@
             </a:r>
           </a:p>
           <a:p>
-            <a:pPr>
+            <a:pPr lvl="0" marL="457200" indent="-228600">
+              <a:buFont typeface="Calibri"/>
               <a:spcAft>
                 <a:spcPts val="1000"/>
               </a:spcAft>
+              <a:buSzPct val="100000"/>
               <a:buChar char="•"/>
               <a:lnSpc>
                 <a:spcPts val="2200"/>
@@ -6442,10 +6512,12 @@
             </a:r>
           </a:p>
           <a:p>
-            <a:pPr>
+            <a:pPr lvl="0" marL="457200" indent="-228600">
+              <a:buFont typeface="Calibri"/>
               <a:spcAft>
                 <a:spcPts val="1000"/>
               </a:spcAft>
+              <a:buSzPct val="100000"/>
               <a:buChar char="•"/>
               <a:lnSpc>
                 <a:spcPts val="2200"/>
